--- a/assets/memos/B1-memo.pptx
+++ b/assets/memos/B1-memo.pptx
@@ -3105,8 +3105,8 @@
         </p:nvSpPr>
         <p:spPr>
           <a:xfrm>
-            <a:off x="648000" y="1180800"/>
-            <a:ext cx="5058000" cy="511200"/>
+            <a:off x="532800" y="1180800"/>
+            <a:ext cx="6490800" cy="511200"/>
           </a:xfrm>
           <a:prstGeom prst="rect">
             <a:avLst/>
@@ -3128,7 +3128,7 @@
               </a:spcAft>
             </a:pPr>
             <a:r>
-              <a:rPr sz="2000" b="1" i="0">
+              <a:rPr sz="1800" b="1" i="0">
                 <a:solidFill>
                   <a:srgbClr val="4388BC"/>
                 </a:solidFill>
@@ -4524,8 +4524,8 @@
         </p:nvSpPr>
         <p:spPr>
           <a:xfrm>
-            <a:off x="648000" y="1180800"/>
-            <a:ext cx="5058000" cy="511200"/>
+            <a:off x="532800" y="1180800"/>
+            <a:ext cx="6490800" cy="511200"/>
           </a:xfrm>
           <a:prstGeom prst="rect">
             <a:avLst/>
@@ -4547,7 +4547,7 @@
               </a:spcAft>
             </a:pPr>
             <a:r>
-              <a:rPr sz="2000" b="1" i="0">
+              <a:rPr sz="1800" b="1" i="0">
                 <a:solidFill>
                   <a:srgbClr val="4388BC"/>
                 </a:solidFill>

--- a/assets/memos/B1-memo.pptx
+++ b/assets/memos/B1-memo.pptx
@@ -3402,7 +3402,7 @@
                 </a:solidFill>
                 <a:latin typeface="Arial"/>
               </a:rPr>
-              <a:t>→ Aujourd'hui, l'e-mail est devenu incontournable : administrations…</a:t>
+              <a:t>→ Aujourd'hui, l'e-mail est devenu incontournable : administrations, banques, médecins, famille tout passe par là. Contrairement aux réseaux sociaux, un e-mail reste un moyen de communication officiel, fiable et durable. Savoir bien l'utiliser, c'est gagner en autonomie et en sérénité au quotidien.</a:t>
             </a:r>
           </a:p>
           <a:p>
@@ -3708,7 +3708,7 @@
                 </a:solidFill>
                 <a:latin typeface="Arial"/>
               </a:rPr>
-              <a:t>→ Il existe de nombreux services de messagerie, mais trois dominent…</a:t>
+              <a:t>→ Il existe de nombreux services de messagerie, mais trois dominent largement le marché en France et en Europe. Chacune a ses atouts et son public.</a:t>
             </a:r>
           </a:p>
           <a:p>
@@ -3746,7 +3746,7 @@
                 </a:solidFill>
                 <a:latin typeface="Arial"/>
               </a:rPr>
-              <a:t>→ La plus répandue dans le monde. Interface claire, excellente inté…</a:t>
+              <a:t>→ La plus répandue dans le monde. Interface claire, excellente intégration avec Drive, Agenda et YouTube. Idéale pour un usage personnel ou professionnel léger.</a:t>
             </a:r>
           </a:p>
           <a:p>
@@ -4014,7 +4014,7 @@
                 </a:solidFill>
                 <a:latin typeface="Arial"/>
               </a:rPr>
-              <a:t>→ Avant de se lancer, comprenons les éléments essentiels de l'inter…</a:t>
+              <a:t>→ Avant de se lancer, comprenons les éléments essentiels de l'interface. Quelle que soit la messagerie utilisée, vous retrouverez toujours les mêmes grandes zones.</a:t>
             </a:r>
           </a:p>
           <a:p>
@@ -4033,7 +4033,7 @@
                 </a:solidFill>
                 <a:latin typeface="Arial"/>
               </a:rPr>
-              <a:t>→ Sur mobile, les dossiers sont souvent accessibles via un menu "ha…</a:t>
+              <a:t>→ Sur mobile, les dossiers sont souvent accessibles via un menu "hamburger" () en haut à gauche. Ne les cherchez pas trop loin !</a:t>
             </a:r>
           </a:p>
         </p:txBody>
@@ -4282,7 +4282,7 @@
                 </a:solidFill>
                 <a:latin typeface="Arial"/>
               </a:rPr>
-              <a:t>→ Recevoir un mail, c'est bien. Le comprendre, c'est mieux ! Chaque…</a:t>
+              <a:t>→ Recevoir un mail, c'est bien. Le comprendre, c'est mieux ! Chaque e-mail contient plusieurs informations importantes à repérer dès le premier regard.</a:t>
             </a:r>
           </a:p>
           <a:p>
@@ -4320,7 +4320,7 @@
                 </a:solidFill>
                 <a:latin typeface="Arial"/>
               </a:rPr>
-              <a:t>→ Qui vous écrit ? Vérifiez toujours l'adresse complète, pas seulem…</a:t>
+              <a:t>→ Qui vous écrit ? Vérifiez toujours l'adresse complète, pas seulement le nom affiché. Un vrai organisme possède une adresse officielle (ex : noreply@ameli.fr).</a:t>
             </a:r>
           </a:p>
           <a:p>
@@ -4339,7 +4339,7 @@
                 </a:solidFill>
                 <a:latin typeface="Arial"/>
               </a:rPr>
-              <a:t>→ Le résumé du sujet traité. Un objet vide ou bizarre doit vous ale…</a:t>
+              <a:t>→ Le résumé du sujet traité. Un objet vide ou bizarre doit vous alerter. Un bon expéditeur donne toujours un objet clair et précis.</a:t>
             </a:r>
           </a:p>
         </p:txBody>
@@ -4821,7 +4821,7 @@
                 </a:solidFill>
                 <a:latin typeface="Arial"/>
               </a:rPr>
-              <a:t>→ Envoyer un mail professionnel ou personnel ne s'improvise pas tou…</a:t>
+              <a:t>→ Envoyer un mail professionnel ou personnel ne s'improvise pas tout à fait. Voici les étapes clés pour composer un message clair et bien reçu.</a:t>
             </a:r>
           </a:p>
           <a:p>
@@ -5127,7 +5127,7 @@
                 </a:solidFill>
                 <a:latin typeface="Arial"/>
               </a:rPr>
-              <a:t>→ Quand vous composez un e-mail, trois champs destinataires sont di…</a:t>
+              <a:t>→ Quand vous composez un e-mail, trois champs destinataires sont disponibles. Chacun a un rôle précis que beaucoup de gens confondent.</a:t>
             </a:r>
           </a:p>
           <a:p>
@@ -5165,7 +5165,7 @@
                 </a:solidFill>
                 <a:latin typeface="Arial"/>
               </a:rPr>
-              <a:t>→ La ou les personnes directement concernées par le message. Elles …</a:t>
+              <a:t>→ La ou les personnes directement concernées par le message. Elles sont censées répondre ou agir.</a:t>
             </a:r>
           </a:p>
           <a:p>
@@ -5433,7 +5433,7 @@
                 </a:solidFill>
                 <a:latin typeface="Arial"/>
               </a:rPr>
-              <a:t>→ Une pièce jointe permet d'envoyer un fichier (photo, document PDF…</a:t>
+              <a:t>→ Une pièce jointe permet d'envoyer un fichier (photo, document PDF, facture) avec votre e-mail. C'est très pratique, mais quelques règles s'imposent pour éviter les mauvaises surprises.</a:t>
             </a:r>
           </a:p>
           <a:p>
@@ -5471,7 +5471,7 @@
                 </a:solidFill>
                 <a:latin typeface="Arial"/>
               </a:rPr>
-              <a:t>→ Présente dans toutes les messageries lors de la rédaction d'un no…</a:t>
+              <a:t>→ Présente dans toutes les messageries lors de la rédaction d'un nouveau message.</a:t>
             </a:r>
           </a:p>
           <a:p>

--- a/assets/memos/B1-memo.pptx
+++ b/assets/memos/B1-memo.pptx
@@ -3167,7 +3167,7 @@
         <p:spPr>
           <a:xfrm>
             <a:off x="532800" y="1749600"/>
-            <a:ext cx="6490800" cy="1371600"/>
+            <a:ext cx="6490800" cy="1684800"/>
           </a:xfrm>
           <a:prstGeom prst="rect">
             <a:avLst/>
@@ -3208,7 +3208,7 @@
         <p:spPr>
           <a:xfrm>
             <a:off x="532800" y="1749600"/>
-            <a:ext cx="572400" cy="1371600"/>
+            <a:ext cx="572400" cy="1684800"/>
           </a:xfrm>
           <a:prstGeom prst="rect">
             <a:avLst/>
@@ -3374,7 +3374,7 @@
         <p:spPr>
           <a:xfrm>
             <a:off x="1159200" y="2214000"/>
-            <a:ext cx="5828400" cy="885600"/>
+            <a:ext cx="5828400" cy="1184399"/>
           </a:xfrm>
           <a:prstGeom prst="rect">
             <a:avLst/>
@@ -3472,8 +3472,8 @@
         </p:nvSpPr>
         <p:spPr>
           <a:xfrm>
-            <a:off x="532800" y="3186000"/>
-            <a:ext cx="6490800" cy="1371600"/>
+            <a:off x="532800" y="3499199"/>
+            <a:ext cx="6490800" cy="1684800"/>
           </a:xfrm>
           <a:prstGeom prst="rect">
             <a:avLst/>
@@ -3513,8 +3513,8 @@
         </p:nvSpPr>
         <p:spPr>
           <a:xfrm>
-            <a:off x="532800" y="3186000"/>
-            <a:ext cx="572400" cy="1371600"/>
+            <a:off x="532800" y="3499199"/>
+            <a:ext cx="572400" cy="1684800"/>
           </a:xfrm>
           <a:prstGeom prst="rect">
             <a:avLst/>
@@ -3554,7 +3554,7 @@
         </p:nvSpPr>
         <p:spPr>
           <a:xfrm>
-            <a:off x="1206000" y="3607200"/>
+            <a:off x="1206000" y="3920399"/>
             <a:ext cx="5752800" cy="7200"/>
           </a:xfrm>
           <a:prstGeom prst="rect">
@@ -3595,7 +3595,7 @@
         </p:nvSpPr>
         <p:spPr>
           <a:xfrm>
-            <a:off x="532800" y="3252600"/>
+            <a:off x="532800" y="3565800"/>
             <a:ext cx="572400" cy="288000"/>
           </a:xfrm>
           <a:prstGeom prst="rect">
@@ -3637,7 +3637,7 @@
         </p:nvSpPr>
         <p:spPr>
           <a:xfrm>
-            <a:off x="1177200" y="3221999"/>
+            <a:off x="1177200" y="3535199"/>
             <a:ext cx="5810400" cy="370799"/>
           </a:xfrm>
           <a:prstGeom prst="rect">
@@ -3679,8 +3679,8 @@
         </p:nvSpPr>
         <p:spPr>
           <a:xfrm>
-            <a:off x="1159200" y="3650399"/>
-            <a:ext cx="5828400" cy="885600"/>
+            <a:off x="1159200" y="3963599"/>
+            <a:ext cx="5828400" cy="1184399"/>
           </a:xfrm>
           <a:prstGeom prst="rect">
             <a:avLst/>
@@ -3778,8 +3778,8 @@
         </p:nvSpPr>
         <p:spPr>
           <a:xfrm>
-            <a:off x="532800" y="4622400"/>
-            <a:ext cx="6490800" cy="1371600"/>
+            <a:off x="532800" y="5248799"/>
+            <a:ext cx="6490800" cy="1382400"/>
           </a:xfrm>
           <a:prstGeom prst="rect">
             <a:avLst/>
@@ -3819,8 +3819,8 @@
         </p:nvSpPr>
         <p:spPr>
           <a:xfrm>
-            <a:off x="532800" y="4622400"/>
-            <a:ext cx="572400" cy="1371600"/>
+            <a:off x="532800" y="5248799"/>
+            <a:ext cx="572400" cy="1382400"/>
           </a:xfrm>
           <a:prstGeom prst="rect">
             <a:avLst/>
@@ -3860,7 +3860,7 @@
         </p:nvSpPr>
         <p:spPr>
           <a:xfrm>
-            <a:off x="1206000" y="5043600"/>
+            <a:off x="1206000" y="5669999"/>
             <a:ext cx="5752800" cy="7200"/>
           </a:xfrm>
           <a:prstGeom prst="rect">
@@ -3901,7 +3901,7 @@
         </p:nvSpPr>
         <p:spPr>
           <a:xfrm>
-            <a:off x="532800" y="4689000"/>
+            <a:off x="532800" y="5315400"/>
             <a:ext cx="572400" cy="288000"/>
           </a:xfrm>
           <a:prstGeom prst="rect">
@@ -3943,7 +3943,7 @@
         </p:nvSpPr>
         <p:spPr>
           <a:xfrm>
-            <a:off x="1177200" y="4658400"/>
+            <a:off x="1177200" y="5284799"/>
             <a:ext cx="5810400" cy="370799"/>
           </a:xfrm>
           <a:prstGeom prst="rect">
@@ -3985,8 +3985,8 @@
         </p:nvSpPr>
         <p:spPr>
           <a:xfrm>
-            <a:off x="1159200" y="5086800"/>
-            <a:ext cx="5828400" cy="885600"/>
+            <a:off x="1159200" y="5713199"/>
+            <a:ext cx="5828400" cy="881999"/>
           </a:xfrm>
           <a:prstGeom prst="rect">
             <a:avLst/>
@@ -4046,8 +4046,8 @@
         </p:nvSpPr>
         <p:spPr>
           <a:xfrm>
-            <a:off x="532800" y="6058799"/>
-            <a:ext cx="6490800" cy="1371600"/>
+            <a:off x="532800" y="6695999"/>
+            <a:ext cx="6490800" cy="1382400"/>
           </a:xfrm>
           <a:prstGeom prst="rect">
             <a:avLst/>
@@ -4087,8 +4087,8 @@
         </p:nvSpPr>
         <p:spPr>
           <a:xfrm>
-            <a:off x="532800" y="6058799"/>
-            <a:ext cx="572400" cy="1371600"/>
+            <a:off x="532800" y="6695999"/>
+            <a:ext cx="572400" cy="1382400"/>
           </a:xfrm>
           <a:prstGeom prst="rect">
             <a:avLst/>
@@ -4128,7 +4128,7 @@
         </p:nvSpPr>
         <p:spPr>
           <a:xfrm>
-            <a:off x="1206000" y="6480000"/>
+            <a:off x="1206000" y="7117199"/>
             <a:ext cx="5752800" cy="7200"/>
           </a:xfrm>
           <a:prstGeom prst="rect">
@@ -4169,7 +4169,7 @@
         </p:nvSpPr>
         <p:spPr>
           <a:xfrm>
-            <a:off x="532800" y="6125399"/>
+            <a:off x="532800" y="6762599"/>
             <a:ext cx="572400" cy="288000"/>
           </a:xfrm>
           <a:prstGeom prst="rect">
@@ -4211,7 +4211,7 @@
         </p:nvSpPr>
         <p:spPr>
           <a:xfrm>
-            <a:off x="1177200" y="6094800"/>
+            <a:off x="1177200" y="6732000"/>
             <a:ext cx="5810400" cy="370799"/>
           </a:xfrm>
           <a:prstGeom prst="rect">
@@ -4240,7 +4240,7 @@
                 </a:solidFill>
                 <a:latin typeface="Arial"/>
               </a:rPr>
-              <a:t>Lire et comprendre un e-mail reçu</a:t>
+              <a:t>Rédiger et envoyer un e-mail</a:t>
             </a:r>
           </a:p>
         </p:txBody>
@@ -4253,8 +4253,8 @@
         </p:nvSpPr>
         <p:spPr>
           <a:xfrm>
-            <a:off x="1159200" y="6523200"/>
-            <a:ext cx="5828400" cy="885600"/>
+            <a:off x="1159200" y="7160399"/>
+            <a:ext cx="5828400" cy="881999"/>
           </a:xfrm>
           <a:prstGeom prst="rect">
             <a:avLst/>
@@ -4282,7 +4282,7 @@
                 </a:solidFill>
                 <a:latin typeface="Arial"/>
               </a:rPr>
-              <a:t>→ Recevoir un mail, c'est bien. Le comprendre, c'est mieux ! Chaque e-mail contient plusieurs informations importantes à repérer dès le premier regard.</a:t>
+              <a:t>→ Envoyer un mail professionnel ou personnel ne s'improvise pas tout à fait. Voici les étapes clés pour composer un message clair et bien reçu.</a:t>
             </a:r>
           </a:p>
           <a:p>
@@ -4301,7 +4301,7 @@
                 </a:solidFill>
                 <a:latin typeface="Arial"/>
               </a:rPr>
-              <a:t>→ L'expéditeur</a:t>
+              <a:t>→ Cliquez Nouveau</a:t>
             </a:r>
           </a:p>
           <a:p>
@@ -4320,7 +4320,7 @@
                 </a:solidFill>
                 <a:latin typeface="Arial"/>
               </a:rPr>
-              <a:t>→ Qui vous écrit ? Vérifiez toujours l'adresse complète, pas seulement le nom affiché. Un vrai organisme possède une adresse officielle (ex : noreply@ameli.fr).</a:t>
+              <a:t>→ Destinataire &amp; Objet</a:t>
             </a:r>
           </a:p>
           <a:p>
@@ -4339,7 +4339,7 @@
                 </a:solidFill>
                 <a:latin typeface="Arial"/>
               </a:rPr>
-              <a:t>→ Le résumé du sujet traité. Un objet vide ou bizarre doit vous alerter. Un bon expéditeur donne toujours un objet clair et précis.</a:t>
+              <a:t>→ Rédigez le message</a:t>
             </a:r>
           </a:p>
         </p:txBody>
@@ -4352,7 +4352,7 @@
         </p:nvSpPr>
         <p:spPr>
           <a:xfrm>
-            <a:off x="532800" y="7639200"/>
+            <a:off x="532800" y="8215199"/>
             <a:ext cx="6490800" cy="658800"/>
           </a:xfrm>
           <a:prstGeom prst="rect">
@@ -4395,7 +4395,7 @@
         </p:nvSpPr>
         <p:spPr>
           <a:xfrm>
-            <a:off x="1540799" y="7675200"/>
+            <a:off x="1540799" y="8251199"/>
             <a:ext cx="5410800" cy="604800"/>
           </a:xfrm>
           <a:prstGeom prst="rect">
@@ -4424,7 +4424,7 @@
                 </a:solidFill>
                 <a:latin typeface="Arial"/>
               </a:rPr>
-              <a:t>→ Suite en page 2 : Rédiger et envoyer un e-mail | Les champs À, Cc et Cci expliqués | Ajouter une pièce jointe</a:t>
+              <a:t>→ Suite en page 2 : Lire et comprendre un e-mail reçu | Les champs À, Cc et Cci expliqués | Ajouter une pièce jointe</a:t>
             </a:r>
           </a:p>
           <a:p>
@@ -4586,7 +4586,7 @@
         <p:spPr>
           <a:xfrm>
             <a:off x="532800" y="1749600"/>
-            <a:ext cx="6490800" cy="1371600"/>
+            <a:ext cx="6490800" cy="1835999"/>
           </a:xfrm>
           <a:prstGeom prst="rect">
             <a:avLst/>
@@ -4627,7 +4627,7 @@
         <p:spPr>
           <a:xfrm>
             <a:off x="532800" y="1749600"/>
-            <a:ext cx="572400" cy="1371600"/>
+            <a:ext cx="572400" cy="1835999"/>
           </a:xfrm>
           <a:prstGeom prst="rect">
             <a:avLst/>
@@ -4779,7 +4779,7 @@
                 </a:solidFill>
                 <a:latin typeface="Arial"/>
               </a:rPr>
-              <a:t>Rédiger et envoyer un e-mail</a:t>
+              <a:t>Lire et comprendre un e-mail reçu</a:t>
             </a:r>
           </a:p>
         </p:txBody>
@@ -4793,7 +4793,7 @@
         <p:spPr>
           <a:xfrm>
             <a:off x="1159200" y="2214000"/>
-            <a:ext cx="5828400" cy="885600"/>
+            <a:ext cx="5828400" cy="1335599"/>
           </a:xfrm>
           <a:prstGeom prst="rect">
             <a:avLst/>
@@ -4821,7 +4821,7 @@
                 </a:solidFill>
                 <a:latin typeface="Arial"/>
               </a:rPr>
-              <a:t>→ Envoyer un mail professionnel ou personnel ne s'improvise pas tout à fait. Voici les étapes clés pour composer un message clair et bien reçu.</a:t>
+              <a:t>→ Recevoir un mail, c'est bien. Le comprendre, c'est mieux ! Chaque e-mail contient plusieurs informations importantes à repérer dès le premier regard.</a:t>
             </a:r>
           </a:p>
           <a:p>
@@ -4840,7 +4840,7 @@
                 </a:solidFill>
                 <a:latin typeface="Arial"/>
               </a:rPr>
-              <a:t>→ Cliquez Nouveau</a:t>
+              <a:t>→ L'expéditeur</a:t>
             </a:r>
           </a:p>
           <a:p>
@@ -4859,7 +4859,7 @@
                 </a:solidFill>
                 <a:latin typeface="Arial"/>
               </a:rPr>
-              <a:t>→ Destinataire &amp; Objet</a:t>
+              <a:t>→ Qui vous écrit ? Vérifiez toujours l'adresse complète, pas seulement le nom affiché. Un vrai organisme possède une adresse officielle (ex : noreply@ameli.fr).</a:t>
             </a:r>
           </a:p>
           <a:p>
@@ -4878,7 +4878,7 @@
                 </a:solidFill>
                 <a:latin typeface="Arial"/>
               </a:rPr>
-              <a:t>→ Rédigez le message</a:t>
+              <a:t>→ Le résumé du sujet traité. Un objet vide ou bizarre doit vous alerter. Un bon expéditeur donne toujours un objet clair et précis.</a:t>
             </a:r>
           </a:p>
         </p:txBody>
@@ -4891,8 +4891,8 @@
         </p:nvSpPr>
         <p:spPr>
           <a:xfrm>
-            <a:off x="532800" y="3186000"/>
-            <a:ext cx="6490800" cy="1371600"/>
+            <a:off x="532800" y="3650400"/>
+            <a:ext cx="6490800" cy="1533600"/>
           </a:xfrm>
           <a:prstGeom prst="rect">
             <a:avLst/>
@@ -4932,8 +4932,8 @@
         </p:nvSpPr>
         <p:spPr>
           <a:xfrm>
-            <a:off x="532800" y="3186000"/>
-            <a:ext cx="572400" cy="1371600"/>
+            <a:off x="532800" y="3650400"/>
+            <a:ext cx="572400" cy="1533600"/>
           </a:xfrm>
           <a:prstGeom prst="rect">
             <a:avLst/>
@@ -4973,7 +4973,7 @@
         </p:nvSpPr>
         <p:spPr>
           <a:xfrm>
-            <a:off x="1206000" y="3607200"/>
+            <a:off x="1206000" y="4071600"/>
             <a:ext cx="5752800" cy="7200"/>
           </a:xfrm>
           <a:prstGeom prst="rect">
@@ -5014,7 +5014,7 @@
         </p:nvSpPr>
         <p:spPr>
           <a:xfrm>
-            <a:off x="532800" y="3252600"/>
+            <a:off x="532800" y="3717000"/>
             <a:ext cx="572400" cy="288000"/>
           </a:xfrm>
           <a:prstGeom prst="rect">
@@ -5056,7 +5056,7 @@
         </p:nvSpPr>
         <p:spPr>
           <a:xfrm>
-            <a:off x="1177200" y="3221999"/>
+            <a:off x="1177200" y="3686400"/>
             <a:ext cx="5810400" cy="370799"/>
           </a:xfrm>
           <a:prstGeom prst="rect">
@@ -5098,8 +5098,8 @@
         </p:nvSpPr>
         <p:spPr>
           <a:xfrm>
-            <a:off x="1159200" y="3650399"/>
-            <a:ext cx="5828400" cy="885600"/>
+            <a:off x="1159200" y="4114800"/>
+            <a:ext cx="5828400" cy="1033199"/>
           </a:xfrm>
           <a:prstGeom prst="rect">
             <a:avLst/>
@@ -5197,8 +5197,8 @@
         </p:nvSpPr>
         <p:spPr>
           <a:xfrm>
-            <a:off x="532800" y="4622400"/>
-            <a:ext cx="6490800" cy="1371600"/>
+            <a:off x="532800" y="5248800"/>
+            <a:ext cx="6490800" cy="1684800"/>
           </a:xfrm>
           <a:prstGeom prst="rect">
             <a:avLst/>
@@ -5238,8 +5238,8 @@
         </p:nvSpPr>
         <p:spPr>
           <a:xfrm>
-            <a:off x="532800" y="4622400"/>
-            <a:ext cx="572400" cy="1371600"/>
+            <a:off x="532800" y="5248800"/>
+            <a:ext cx="572400" cy="1684800"/>
           </a:xfrm>
           <a:prstGeom prst="rect">
             <a:avLst/>
@@ -5279,7 +5279,7 @@
         </p:nvSpPr>
         <p:spPr>
           <a:xfrm>
-            <a:off x="1206000" y="5043600"/>
+            <a:off x="1206000" y="5670000"/>
             <a:ext cx="5752800" cy="7200"/>
           </a:xfrm>
           <a:prstGeom prst="rect">
@@ -5320,7 +5320,7 @@
         </p:nvSpPr>
         <p:spPr>
           <a:xfrm>
-            <a:off x="532800" y="4689000"/>
+            <a:off x="532800" y="5315400"/>
             <a:ext cx="572400" cy="288000"/>
           </a:xfrm>
           <a:prstGeom prst="rect">
@@ -5362,7 +5362,7 @@
         </p:nvSpPr>
         <p:spPr>
           <a:xfrm>
-            <a:off x="1177200" y="4658400"/>
+            <a:off x="1177200" y="5284800"/>
             <a:ext cx="5810400" cy="370799"/>
           </a:xfrm>
           <a:prstGeom prst="rect">
@@ -5404,8 +5404,8 @@
         </p:nvSpPr>
         <p:spPr>
           <a:xfrm>
-            <a:off x="1159200" y="5086800"/>
-            <a:ext cx="5828400" cy="885600"/>
+            <a:off x="1159200" y="5713200"/>
+            <a:ext cx="5828400" cy="1184399"/>
           </a:xfrm>
           <a:prstGeom prst="rect">
             <a:avLst/>

--- a/assets/memos/B1-memo.pptx
+++ b/assets/memos/B1-memo.pptx
@@ -3097,9 +3097,35 @@
         <p:nvPr/>
       </p:nvGrpSpPr>
       <p:grpSpPr/>
-      <p:sp>
-        <p:nvSpPr>
-          <p:cNvPr id="2" name="TextBox 1"/>
+      <p:pic>
+        <p:nvPicPr>
+          <p:cNvPr id="2" name="Picture 1" descr="bg-p1.png"/>
+          <p:cNvPicPr>
+            <a:picLocks noChangeAspect="1"/>
+          </p:cNvPicPr>
+          <p:nvPr/>
+        </p:nvPicPr>
+        <p:blipFill>
+          <a:blip r:embed="rId2">
+            <a:alphaModFix amt="80000"/>
+          </a:blip>
+          <a:stretch>
+            <a:fillRect/>
+          </a:stretch>
+        </p:blipFill>
+        <p:spPr>
+          <a:xfrm>
+            <a:off x="0" y="0"/>
+            <a:ext cx="7556399" cy="10692000"/>
+          </a:xfrm>
+          <a:prstGeom prst="rect">
+            <a:avLst/>
+          </a:prstGeom>
+        </p:spPr>
+      </p:pic>
+      <p:sp>
+        <p:nvSpPr>
+          <p:cNvPr id="3" name="TextBox 2"/>
           <p:cNvSpPr txBox="1"/>
           <p:nvPr/>
         </p:nvSpPr>
@@ -3160,7 +3186,7 @@
       </p:sp>
       <p:sp>
         <p:nvSpPr>
-          <p:cNvPr id="3" name="Rectangle 2"/>
+          <p:cNvPr id="4" name="Rectangle 3"/>
           <p:cNvSpPr/>
           <p:nvPr/>
         </p:nvSpPr>
@@ -3201,7 +3227,7 @@
       </p:sp>
       <p:sp>
         <p:nvSpPr>
-          <p:cNvPr id="4" name="Rectangle 3"/>
+          <p:cNvPr id="5" name="Rectangle 4"/>
           <p:cNvSpPr/>
           <p:nvPr/>
         </p:nvSpPr>
@@ -3242,7 +3268,7 @@
       </p:sp>
       <p:sp>
         <p:nvSpPr>
-          <p:cNvPr id="5" name="Rectangle 4"/>
+          <p:cNvPr id="6" name="Rectangle 5"/>
           <p:cNvSpPr/>
           <p:nvPr/>
         </p:nvSpPr>
@@ -3283,7 +3309,7 @@
       </p:sp>
       <p:sp>
         <p:nvSpPr>
-          <p:cNvPr id="6" name="TextBox 5"/>
+          <p:cNvPr id="7" name="TextBox 6"/>
           <p:cNvSpPr txBox="1"/>
           <p:nvPr/>
         </p:nvSpPr>
@@ -3325,7 +3351,7 @@
       </p:sp>
       <p:sp>
         <p:nvSpPr>
-          <p:cNvPr id="7" name="TextBox 6"/>
+          <p:cNvPr id="8" name="TextBox 7"/>
           <p:cNvSpPr txBox="1"/>
           <p:nvPr/>
         </p:nvSpPr>
@@ -3367,7 +3393,7 @@
       </p:sp>
       <p:sp>
         <p:nvSpPr>
-          <p:cNvPr id="8" name="TextBox 7"/>
+          <p:cNvPr id="9" name="TextBox 8"/>
           <p:cNvSpPr txBox="1"/>
           <p:nvPr/>
         </p:nvSpPr>
@@ -3466,7 +3492,7 @@
       </p:sp>
       <p:sp>
         <p:nvSpPr>
-          <p:cNvPr id="9" name="Rectangle 8"/>
+          <p:cNvPr id="10" name="Rectangle 9"/>
           <p:cNvSpPr/>
           <p:nvPr/>
         </p:nvSpPr>
@@ -3507,7 +3533,7 @@
       </p:sp>
       <p:sp>
         <p:nvSpPr>
-          <p:cNvPr id="10" name="Rectangle 9"/>
+          <p:cNvPr id="11" name="Rectangle 10"/>
           <p:cNvSpPr/>
           <p:nvPr/>
         </p:nvSpPr>
@@ -3548,7 +3574,7 @@
       </p:sp>
       <p:sp>
         <p:nvSpPr>
-          <p:cNvPr id="11" name="Rectangle 10"/>
+          <p:cNvPr id="12" name="Rectangle 11"/>
           <p:cNvSpPr/>
           <p:nvPr/>
         </p:nvSpPr>
@@ -3589,7 +3615,7 @@
       </p:sp>
       <p:sp>
         <p:nvSpPr>
-          <p:cNvPr id="12" name="TextBox 11"/>
+          <p:cNvPr id="13" name="TextBox 12"/>
           <p:cNvSpPr txBox="1"/>
           <p:nvPr/>
         </p:nvSpPr>
@@ -3631,7 +3657,7 @@
       </p:sp>
       <p:sp>
         <p:nvSpPr>
-          <p:cNvPr id="13" name="TextBox 12"/>
+          <p:cNvPr id="14" name="TextBox 13"/>
           <p:cNvSpPr txBox="1"/>
           <p:nvPr/>
         </p:nvSpPr>
@@ -3673,7 +3699,7 @@
       </p:sp>
       <p:sp>
         <p:nvSpPr>
-          <p:cNvPr id="14" name="TextBox 13"/>
+          <p:cNvPr id="15" name="TextBox 14"/>
           <p:cNvSpPr txBox="1"/>
           <p:nvPr/>
         </p:nvSpPr>
@@ -3772,7 +3798,7 @@
       </p:sp>
       <p:sp>
         <p:nvSpPr>
-          <p:cNvPr id="15" name="Rectangle 14"/>
+          <p:cNvPr id="16" name="Rectangle 15"/>
           <p:cNvSpPr/>
           <p:nvPr/>
         </p:nvSpPr>
@@ -3813,7 +3839,7 @@
       </p:sp>
       <p:sp>
         <p:nvSpPr>
-          <p:cNvPr id="16" name="Rectangle 15"/>
+          <p:cNvPr id="17" name="Rectangle 16"/>
           <p:cNvSpPr/>
           <p:nvPr/>
         </p:nvSpPr>
@@ -3854,7 +3880,7 @@
       </p:sp>
       <p:sp>
         <p:nvSpPr>
-          <p:cNvPr id="17" name="Rectangle 16"/>
+          <p:cNvPr id="18" name="Rectangle 17"/>
           <p:cNvSpPr/>
           <p:nvPr/>
         </p:nvSpPr>
@@ -3895,7 +3921,7 @@
       </p:sp>
       <p:sp>
         <p:nvSpPr>
-          <p:cNvPr id="18" name="TextBox 17"/>
+          <p:cNvPr id="19" name="TextBox 18"/>
           <p:cNvSpPr txBox="1"/>
           <p:nvPr/>
         </p:nvSpPr>
@@ -3937,7 +3963,7 @@
       </p:sp>
       <p:sp>
         <p:nvSpPr>
-          <p:cNvPr id="19" name="TextBox 18"/>
+          <p:cNvPr id="20" name="TextBox 19"/>
           <p:cNvSpPr txBox="1"/>
           <p:nvPr/>
         </p:nvSpPr>
@@ -3979,7 +4005,7 @@
       </p:sp>
       <p:sp>
         <p:nvSpPr>
-          <p:cNvPr id="20" name="TextBox 19"/>
+          <p:cNvPr id="21" name="TextBox 20"/>
           <p:cNvSpPr txBox="1"/>
           <p:nvPr/>
         </p:nvSpPr>
@@ -4040,7 +4066,7 @@
       </p:sp>
       <p:sp>
         <p:nvSpPr>
-          <p:cNvPr id="21" name="Rectangle 20"/>
+          <p:cNvPr id="22" name="Rectangle 21"/>
           <p:cNvSpPr/>
           <p:nvPr/>
         </p:nvSpPr>
@@ -4081,7 +4107,7 @@
       </p:sp>
       <p:sp>
         <p:nvSpPr>
-          <p:cNvPr id="22" name="Rectangle 21"/>
+          <p:cNvPr id="23" name="Rectangle 22"/>
           <p:cNvSpPr/>
           <p:nvPr/>
         </p:nvSpPr>
@@ -4122,7 +4148,7 @@
       </p:sp>
       <p:sp>
         <p:nvSpPr>
-          <p:cNvPr id="23" name="Rectangle 22"/>
+          <p:cNvPr id="24" name="Rectangle 23"/>
           <p:cNvSpPr/>
           <p:nvPr/>
         </p:nvSpPr>
@@ -4163,7 +4189,7 @@
       </p:sp>
       <p:sp>
         <p:nvSpPr>
-          <p:cNvPr id="24" name="TextBox 23"/>
+          <p:cNvPr id="25" name="TextBox 24"/>
           <p:cNvSpPr txBox="1"/>
           <p:nvPr/>
         </p:nvSpPr>
@@ -4205,7 +4231,7 @@
       </p:sp>
       <p:sp>
         <p:nvSpPr>
-          <p:cNvPr id="25" name="TextBox 24"/>
+          <p:cNvPr id="26" name="TextBox 25"/>
           <p:cNvSpPr txBox="1"/>
           <p:nvPr/>
         </p:nvSpPr>
@@ -4247,7 +4273,7 @@
       </p:sp>
       <p:sp>
         <p:nvSpPr>
-          <p:cNvPr id="26" name="TextBox 25"/>
+          <p:cNvPr id="27" name="TextBox 26"/>
           <p:cNvSpPr txBox="1"/>
           <p:nvPr/>
         </p:nvSpPr>
@@ -4346,7 +4372,7 @@
       </p:sp>
       <p:sp>
         <p:nvSpPr>
-          <p:cNvPr id="27" name="Rectangle 26"/>
+          <p:cNvPr id="28" name="Rectangle 27"/>
           <p:cNvSpPr/>
           <p:nvPr/>
         </p:nvSpPr>
@@ -4389,7 +4415,7 @@
       </p:sp>
       <p:sp>
         <p:nvSpPr>
-          <p:cNvPr id="28" name="TextBox 27"/>
+          <p:cNvPr id="29" name="TextBox 28"/>
           <p:cNvSpPr txBox="1"/>
           <p:nvPr/>
         </p:nvSpPr>
@@ -4450,7 +4476,7 @@
       </p:sp>
       <p:sp>
         <p:nvSpPr>
-          <p:cNvPr id="29" name="TextBox 28"/>
+          <p:cNvPr id="30" name="TextBox 29"/>
           <p:cNvSpPr txBox="1"/>
           <p:nvPr/>
         </p:nvSpPr>
@@ -4516,9 +4542,35 @@
         <p:nvPr/>
       </p:nvGrpSpPr>
       <p:grpSpPr/>
-      <p:sp>
-        <p:nvSpPr>
-          <p:cNvPr id="2" name="TextBox 1"/>
+      <p:pic>
+        <p:nvPicPr>
+          <p:cNvPr id="2" name="Picture 1" descr="bg-p2.png"/>
+          <p:cNvPicPr>
+            <a:picLocks noChangeAspect="1"/>
+          </p:cNvPicPr>
+          <p:nvPr/>
+        </p:nvPicPr>
+        <p:blipFill>
+          <a:blip r:embed="rId2">
+            <a:alphaModFix amt="80000"/>
+          </a:blip>
+          <a:stretch>
+            <a:fillRect/>
+          </a:stretch>
+        </p:blipFill>
+        <p:spPr>
+          <a:xfrm>
+            <a:off x="0" y="0"/>
+            <a:ext cx="7556399" cy="10692000"/>
+          </a:xfrm>
+          <a:prstGeom prst="rect">
+            <a:avLst/>
+          </a:prstGeom>
+        </p:spPr>
+      </p:pic>
+      <p:sp>
+        <p:nvSpPr>
+          <p:cNvPr id="3" name="TextBox 2"/>
           <p:cNvSpPr txBox="1"/>
           <p:nvPr/>
         </p:nvSpPr>
@@ -4579,7 +4631,7 @@
       </p:sp>
       <p:sp>
         <p:nvSpPr>
-          <p:cNvPr id="3" name="Rectangle 2"/>
+          <p:cNvPr id="4" name="Rectangle 3"/>
           <p:cNvSpPr/>
           <p:nvPr/>
         </p:nvSpPr>
@@ -4620,7 +4672,7 @@
       </p:sp>
       <p:sp>
         <p:nvSpPr>
-          <p:cNvPr id="4" name="Rectangle 3"/>
+          <p:cNvPr id="5" name="Rectangle 4"/>
           <p:cNvSpPr/>
           <p:nvPr/>
         </p:nvSpPr>
@@ -4661,7 +4713,7 @@
       </p:sp>
       <p:sp>
         <p:nvSpPr>
-          <p:cNvPr id="5" name="Rectangle 4"/>
+          <p:cNvPr id="6" name="Rectangle 5"/>
           <p:cNvSpPr/>
           <p:nvPr/>
         </p:nvSpPr>
@@ -4702,7 +4754,7 @@
       </p:sp>
       <p:sp>
         <p:nvSpPr>
-          <p:cNvPr id="6" name="TextBox 5"/>
+          <p:cNvPr id="7" name="TextBox 6"/>
           <p:cNvSpPr txBox="1"/>
           <p:nvPr/>
         </p:nvSpPr>
@@ -4744,7 +4796,7 @@
       </p:sp>
       <p:sp>
         <p:nvSpPr>
-          <p:cNvPr id="7" name="TextBox 6"/>
+          <p:cNvPr id="8" name="TextBox 7"/>
           <p:cNvSpPr txBox="1"/>
           <p:nvPr/>
         </p:nvSpPr>
@@ -4786,7 +4838,7 @@
       </p:sp>
       <p:sp>
         <p:nvSpPr>
-          <p:cNvPr id="8" name="TextBox 7"/>
+          <p:cNvPr id="9" name="TextBox 8"/>
           <p:cNvSpPr txBox="1"/>
           <p:nvPr/>
         </p:nvSpPr>
@@ -4885,7 +4937,7 @@
       </p:sp>
       <p:sp>
         <p:nvSpPr>
-          <p:cNvPr id="9" name="Rectangle 8"/>
+          <p:cNvPr id="10" name="Rectangle 9"/>
           <p:cNvSpPr/>
           <p:nvPr/>
         </p:nvSpPr>
@@ -4926,7 +4978,7 @@
       </p:sp>
       <p:sp>
         <p:nvSpPr>
-          <p:cNvPr id="10" name="Rectangle 9"/>
+          <p:cNvPr id="11" name="Rectangle 10"/>
           <p:cNvSpPr/>
           <p:nvPr/>
         </p:nvSpPr>
@@ -4967,7 +5019,7 @@
       </p:sp>
       <p:sp>
         <p:nvSpPr>
-          <p:cNvPr id="11" name="Rectangle 10"/>
+          <p:cNvPr id="12" name="Rectangle 11"/>
           <p:cNvSpPr/>
           <p:nvPr/>
         </p:nvSpPr>
@@ -5008,7 +5060,7 @@
       </p:sp>
       <p:sp>
         <p:nvSpPr>
-          <p:cNvPr id="12" name="TextBox 11"/>
+          <p:cNvPr id="13" name="TextBox 12"/>
           <p:cNvSpPr txBox="1"/>
           <p:nvPr/>
         </p:nvSpPr>
@@ -5050,7 +5102,7 @@
       </p:sp>
       <p:sp>
         <p:nvSpPr>
-          <p:cNvPr id="13" name="TextBox 12"/>
+          <p:cNvPr id="14" name="TextBox 13"/>
           <p:cNvSpPr txBox="1"/>
           <p:nvPr/>
         </p:nvSpPr>
@@ -5092,7 +5144,7 @@
       </p:sp>
       <p:sp>
         <p:nvSpPr>
-          <p:cNvPr id="14" name="TextBox 13"/>
+          <p:cNvPr id="15" name="TextBox 14"/>
           <p:cNvSpPr txBox="1"/>
           <p:nvPr/>
         </p:nvSpPr>
@@ -5191,7 +5243,7 @@
       </p:sp>
       <p:sp>
         <p:nvSpPr>
-          <p:cNvPr id="15" name="Rectangle 14"/>
+          <p:cNvPr id="16" name="Rectangle 15"/>
           <p:cNvSpPr/>
           <p:nvPr/>
         </p:nvSpPr>
@@ -5232,7 +5284,7 @@
       </p:sp>
       <p:sp>
         <p:nvSpPr>
-          <p:cNvPr id="16" name="Rectangle 15"/>
+          <p:cNvPr id="17" name="Rectangle 16"/>
           <p:cNvSpPr/>
           <p:nvPr/>
         </p:nvSpPr>
@@ -5273,7 +5325,7 @@
       </p:sp>
       <p:sp>
         <p:nvSpPr>
-          <p:cNvPr id="17" name="Rectangle 16"/>
+          <p:cNvPr id="18" name="Rectangle 17"/>
           <p:cNvSpPr/>
           <p:nvPr/>
         </p:nvSpPr>
@@ -5314,7 +5366,7 @@
       </p:sp>
       <p:sp>
         <p:nvSpPr>
-          <p:cNvPr id="18" name="TextBox 17"/>
+          <p:cNvPr id="19" name="TextBox 18"/>
           <p:cNvSpPr txBox="1"/>
           <p:nvPr/>
         </p:nvSpPr>
@@ -5356,7 +5408,7 @@
       </p:sp>
       <p:sp>
         <p:nvSpPr>
-          <p:cNvPr id="19" name="TextBox 18"/>
+          <p:cNvPr id="20" name="TextBox 19"/>
           <p:cNvSpPr txBox="1"/>
           <p:nvPr/>
         </p:nvSpPr>
@@ -5398,7 +5450,7 @@
       </p:sp>
       <p:sp>
         <p:nvSpPr>
-          <p:cNvPr id="20" name="TextBox 19"/>
+          <p:cNvPr id="21" name="TextBox 20"/>
           <p:cNvSpPr txBox="1"/>
           <p:nvPr/>
         </p:nvSpPr>
@@ -5497,7 +5549,7 @@
       </p:sp>
       <p:sp>
         <p:nvSpPr>
-          <p:cNvPr id="21" name="Rectangle 20"/>
+          <p:cNvPr id="22" name="Rectangle 21"/>
           <p:cNvSpPr/>
           <p:nvPr/>
         </p:nvSpPr>
@@ -5540,7 +5592,7 @@
       </p:sp>
       <p:sp>
         <p:nvSpPr>
-          <p:cNvPr id="22" name="Rectangle 21"/>
+          <p:cNvPr id="23" name="Rectangle 22"/>
           <p:cNvSpPr/>
           <p:nvPr/>
         </p:nvSpPr>
@@ -5581,7 +5633,7 @@
       </p:sp>
       <p:sp>
         <p:nvSpPr>
-          <p:cNvPr id="23" name="TextBox 22"/>
+          <p:cNvPr id="24" name="TextBox 23"/>
           <p:cNvSpPr txBox="1"/>
           <p:nvPr/>
         </p:nvSpPr>
@@ -5699,7 +5751,7 @@
       </p:sp>
       <p:sp>
         <p:nvSpPr>
-          <p:cNvPr id="24" name="TextBox 23"/>
+          <p:cNvPr id="25" name="TextBox 24"/>
           <p:cNvSpPr txBox="1"/>
           <p:nvPr/>
         </p:nvSpPr>

--- a/assets/memos/B1-memo.pptx
+++ b/assets/memos/B1-memo.pptx
@@ -3084,9 +3084,12 @@
   <p:cSld>
     <p:bg>
       <p:bgPr>
-        <a:solidFill>
-          <a:srgbClr val="FFFFFF"/>
-        </a:solidFill>
+        <a:blipFill>
+          <a:blip r:embed="rId2"/>
+          <a:stretch>
+            <a:fillRect/>
+          </a:stretch>
+        </a:blipFill>
         <a:effectLst/>
       </p:bgPr>
     </p:bg>
@@ -3097,35 +3100,9 @@
         <p:nvPr/>
       </p:nvGrpSpPr>
       <p:grpSpPr/>
-      <p:pic>
-        <p:nvPicPr>
-          <p:cNvPr id="2" name="Picture 1" descr="bg-p1.png"/>
-          <p:cNvPicPr>
-            <a:picLocks noChangeAspect="1"/>
-          </p:cNvPicPr>
-          <p:nvPr/>
-        </p:nvPicPr>
-        <p:blipFill>
-          <a:blip r:embed="rId2">
-            <a:alphaModFix amt="80000"/>
-          </a:blip>
-          <a:stretch>
-            <a:fillRect/>
-          </a:stretch>
-        </p:blipFill>
-        <p:spPr>
-          <a:xfrm>
-            <a:off x="0" y="0"/>
-            <a:ext cx="7556399" cy="10692000"/>
-          </a:xfrm>
-          <a:prstGeom prst="rect">
-            <a:avLst/>
-          </a:prstGeom>
-        </p:spPr>
-      </p:pic>
-      <p:sp>
-        <p:nvSpPr>
-          <p:cNvPr id="3" name="TextBox 2"/>
+      <p:sp>
+        <p:nvSpPr>
+          <p:cNvPr id="2" name="TextBox 1"/>
           <p:cNvSpPr txBox="1"/>
           <p:nvPr/>
         </p:nvSpPr>
@@ -3186,7 +3163,7 @@
       </p:sp>
       <p:sp>
         <p:nvSpPr>
-          <p:cNvPr id="4" name="Rectangle 3"/>
+          <p:cNvPr id="3" name="Rectangle 2"/>
           <p:cNvSpPr/>
           <p:nvPr/>
         </p:nvSpPr>
@@ -3227,7 +3204,7 @@
       </p:sp>
       <p:sp>
         <p:nvSpPr>
-          <p:cNvPr id="5" name="Rectangle 4"/>
+          <p:cNvPr id="4" name="Rectangle 3"/>
           <p:cNvSpPr/>
           <p:nvPr/>
         </p:nvSpPr>
@@ -3268,7 +3245,7 @@
       </p:sp>
       <p:sp>
         <p:nvSpPr>
-          <p:cNvPr id="6" name="Rectangle 5"/>
+          <p:cNvPr id="5" name="Rectangle 4"/>
           <p:cNvSpPr/>
           <p:nvPr/>
         </p:nvSpPr>
@@ -3309,7 +3286,7 @@
       </p:sp>
       <p:sp>
         <p:nvSpPr>
-          <p:cNvPr id="7" name="TextBox 6"/>
+          <p:cNvPr id="6" name="TextBox 5"/>
           <p:cNvSpPr txBox="1"/>
           <p:nvPr/>
         </p:nvSpPr>
@@ -3351,7 +3328,7 @@
       </p:sp>
       <p:sp>
         <p:nvSpPr>
-          <p:cNvPr id="8" name="TextBox 7"/>
+          <p:cNvPr id="7" name="TextBox 6"/>
           <p:cNvSpPr txBox="1"/>
           <p:nvPr/>
         </p:nvSpPr>
@@ -3393,7 +3370,7 @@
       </p:sp>
       <p:sp>
         <p:nvSpPr>
-          <p:cNvPr id="9" name="TextBox 8"/>
+          <p:cNvPr id="8" name="TextBox 7"/>
           <p:cNvSpPr txBox="1"/>
           <p:nvPr/>
         </p:nvSpPr>
@@ -3492,7 +3469,7 @@
       </p:sp>
       <p:sp>
         <p:nvSpPr>
-          <p:cNvPr id="10" name="Rectangle 9"/>
+          <p:cNvPr id="9" name="Rectangle 8"/>
           <p:cNvSpPr/>
           <p:nvPr/>
         </p:nvSpPr>
@@ -3533,7 +3510,7 @@
       </p:sp>
       <p:sp>
         <p:nvSpPr>
-          <p:cNvPr id="11" name="Rectangle 10"/>
+          <p:cNvPr id="10" name="Rectangle 9"/>
           <p:cNvSpPr/>
           <p:nvPr/>
         </p:nvSpPr>
@@ -3574,7 +3551,7 @@
       </p:sp>
       <p:sp>
         <p:nvSpPr>
-          <p:cNvPr id="12" name="Rectangle 11"/>
+          <p:cNvPr id="11" name="Rectangle 10"/>
           <p:cNvSpPr/>
           <p:nvPr/>
         </p:nvSpPr>
@@ -3615,7 +3592,7 @@
       </p:sp>
       <p:sp>
         <p:nvSpPr>
-          <p:cNvPr id="13" name="TextBox 12"/>
+          <p:cNvPr id="12" name="TextBox 11"/>
           <p:cNvSpPr txBox="1"/>
           <p:nvPr/>
         </p:nvSpPr>
@@ -3657,7 +3634,7 @@
       </p:sp>
       <p:sp>
         <p:nvSpPr>
-          <p:cNvPr id="14" name="TextBox 13"/>
+          <p:cNvPr id="13" name="TextBox 12"/>
           <p:cNvSpPr txBox="1"/>
           <p:nvPr/>
         </p:nvSpPr>
@@ -3699,7 +3676,7 @@
       </p:sp>
       <p:sp>
         <p:nvSpPr>
-          <p:cNvPr id="15" name="TextBox 14"/>
+          <p:cNvPr id="14" name="TextBox 13"/>
           <p:cNvSpPr txBox="1"/>
           <p:nvPr/>
         </p:nvSpPr>
@@ -3798,7 +3775,7 @@
       </p:sp>
       <p:sp>
         <p:nvSpPr>
-          <p:cNvPr id="16" name="Rectangle 15"/>
+          <p:cNvPr id="15" name="Rectangle 14"/>
           <p:cNvSpPr/>
           <p:nvPr/>
         </p:nvSpPr>
@@ -3839,7 +3816,7 @@
       </p:sp>
       <p:sp>
         <p:nvSpPr>
-          <p:cNvPr id="17" name="Rectangle 16"/>
+          <p:cNvPr id="16" name="Rectangle 15"/>
           <p:cNvSpPr/>
           <p:nvPr/>
         </p:nvSpPr>
@@ -3880,7 +3857,7 @@
       </p:sp>
       <p:sp>
         <p:nvSpPr>
-          <p:cNvPr id="18" name="Rectangle 17"/>
+          <p:cNvPr id="17" name="Rectangle 16"/>
           <p:cNvSpPr/>
           <p:nvPr/>
         </p:nvSpPr>
@@ -3921,7 +3898,7 @@
       </p:sp>
       <p:sp>
         <p:nvSpPr>
-          <p:cNvPr id="19" name="TextBox 18"/>
+          <p:cNvPr id="18" name="TextBox 17"/>
           <p:cNvSpPr txBox="1"/>
           <p:nvPr/>
         </p:nvSpPr>
@@ -3963,7 +3940,7 @@
       </p:sp>
       <p:sp>
         <p:nvSpPr>
-          <p:cNvPr id="20" name="TextBox 19"/>
+          <p:cNvPr id="19" name="TextBox 18"/>
           <p:cNvSpPr txBox="1"/>
           <p:nvPr/>
         </p:nvSpPr>
@@ -4005,7 +3982,7 @@
       </p:sp>
       <p:sp>
         <p:nvSpPr>
-          <p:cNvPr id="21" name="TextBox 20"/>
+          <p:cNvPr id="20" name="TextBox 19"/>
           <p:cNvSpPr txBox="1"/>
           <p:nvPr/>
         </p:nvSpPr>
@@ -4066,7 +4043,7 @@
       </p:sp>
       <p:sp>
         <p:nvSpPr>
-          <p:cNvPr id="22" name="Rectangle 21"/>
+          <p:cNvPr id="21" name="Rectangle 20"/>
           <p:cNvSpPr/>
           <p:nvPr/>
         </p:nvSpPr>
@@ -4107,7 +4084,7 @@
       </p:sp>
       <p:sp>
         <p:nvSpPr>
-          <p:cNvPr id="23" name="Rectangle 22"/>
+          <p:cNvPr id="22" name="Rectangle 21"/>
           <p:cNvSpPr/>
           <p:nvPr/>
         </p:nvSpPr>
@@ -4148,7 +4125,7 @@
       </p:sp>
       <p:sp>
         <p:nvSpPr>
-          <p:cNvPr id="24" name="Rectangle 23"/>
+          <p:cNvPr id="23" name="Rectangle 22"/>
           <p:cNvSpPr/>
           <p:nvPr/>
         </p:nvSpPr>
@@ -4189,7 +4166,7 @@
       </p:sp>
       <p:sp>
         <p:nvSpPr>
-          <p:cNvPr id="25" name="TextBox 24"/>
+          <p:cNvPr id="24" name="TextBox 23"/>
           <p:cNvSpPr txBox="1"/>
           <p:nvPr/>
         </p:nvSpPr>
@@ -4231,7 +4208,7 @@
       </p:sp>
       <p:sp>
         <p:nvSpPr>
-          <p:cNvPr id="26" name="TextBox 25"/>
+          <p:cNvPr id="25" name="TextBox 24"/>
           <p:cNvSpPr txBox="1"/>
           <p:nvPr/>
         </p:nvSpPr>
@@ -4273,7 +4250,7 @@
       </p:sp>
       <p:sp>
         <p:nvSpPr>
-          <p:cNvPr id="27" name="TextBox 26"/>
+          <p:cNvPr id="26" name="TextBox 25"/>
           <p:cNvSpPr txBox="1"/>
           <p:nvPr/>
         </p:nvSpPr>
@@ -4372,7 +4349,7 @@
       </p:sp>
       <p:sp>
         <p:nvSpPr>
-          <p:cNvPr id="28" name="Rectangle 27"/>
+          <p:cNvPr id="27" name="Rectangle 26"/>
           <p:cNvSpPr/>
           <p:nvPr/>
         </p:nvSpPr>
@@ -4415,7 +4392,7 @@
       </p:sp>
       <p:sp>
         <p:nvSpPr>
-          <p:cNvPr id="29" name="TextBox 28"/>
+          <p:cNvPr id="28" name="TextBox 27"/>
           <p:cNvSpPr txBox="1"/>
           <p:nvPr/>
         </p:nvSpPr>
@@ -4476,7 +4453,7 @@
       </p:sp>
       <p:sp>
         <p:nvSpPr>
-          <p:cNvPr id="30" name="TextBox 29"/>
+          <p:cNvPr id="29" name="TextBox 28"/>
           <p:cNvSpPr txBox="1"/>
           <p:nvPr/>
         </p:nvSpPr>
@@ -4529,9 +4506,12 @@
   <p:cSld>
     <p:bg>
       <p:bgPr>
-        <a:solidFill>
-          <a:srgbClr val="FFFFFF"/>
-        </a:solidFill>
+        <a:blipFill>
+          <a:blip r:embed="rId2"/>
+          <a:stretch>
+            <a:fillRect/>
+          </a:stretch>
+        </a:blipFill>
         <a:effectLst/>
       </p:bgPr>
     </p:bg>
@@ -4542,35 +4522,9 @@
         <p:nvPr/>
       </p:nvGrpSpPr>
       <p:grpSpPr/>
-      <p:pic>
-        <p:nvPicPr>
-          <p:cNvPr id="2" name="Picture 1" descr="bg-p2.png"/>
-          <p:cNvPicPr>
-            <a:picLocks noChangeAspect="1"/>
-          </p:cNvPicPr>
-          <p:nvPr/>
-        </p:nvPicPr>
-        <p:blipFill>
-          <a:blip r:embed="rId2">
-            <a:alphaModFix amt="80000"/>
-          </a:blip>
-          <a:stretch>
-            <a:fillRect/>
-          </a:stretch>
-        </p:blipFill>
-        <p:spPr>
-          <a:xfrm>
-            <a:off x="0" y="0"/>
-            <a:ext cx="7556399" cy="10692000"/>
-          </a:xfrm>
-          <a:prstGeom prst="rect">
-            <a:avLst/>
-          </a:prstGeom>
-        </p:spPr>
-      </p:pic>
-      <p:sp>
-        <p:nvSpPr>
-          <p:cNvPr id="3" name="TextBox 2"/>
+      <p:sp>
+        <p:nvSpPr>
+          <p:cNvPr id="2" name="TextBox 1"/>
           <p:cNvSpPr txBox="1"/>
           <p:nvPr/>
         </p:nvSpPr>
@@ -4631,7 +4585,7 @@
       </p:sp>
       <p:sp>
         <p:nvSpPr>
-          <p:cNvPr id="4" name="Rectangle 3"/>
+          <p:cNvPr id="3" name="Rectangle 2"/>
           <p:cNvSpPr/>
           <p:nvPr/>
         </p:nvSpPr>
@@ -4672,7 +4626,7 @@
       </p:sp>
       <p:sp>
         <p:nvSpPr>
-          <p:cNvPr id="5" name="Rectangle 4"/>
+          <p:cNvPr id="4" name="Rectangle 3"/>
           <p:cNvSpPr/>
           <p:nvPr/>
         </p:nvSpPr>
@@ -4713,7 +4667,7 @@
       </p:sp>
       <p:sp>
         <p:nvSpPr>
-          <p:cNvPr id="6" name="Rectangle 5"/>
+          <p:cNvPr id="5" name="Rectangle 4"/>
           <p:cNvSpPr/>
           <p:nvPr/>
         </p:nvSpPr>
@@ -4754,7 +4708,7 @@
       </p:sp>
       <p:sp>
         <p:nvSpPr>
-          <p:cNvPr id="7" name="TextBox 6"/>
+          <p:cNvPr id="6" name="TextBox 5"/>
           <p:cNvSpPr txBox="1"/>
           <p:nvPr/>
         </p:nvSpPr>
@@ -4796,7 +4750,7 @@
       </p:sp>
       <p:sp>
         <p:nvSpPr>
-          <p:cNvPr id="8" name="TextBox 7"/>
+          <p:cNvPr id="7" name="TextBox 6"/>
           <p:cNvSpPr txBox="1"/>
           <p:nvPr/>
         </p:nvSpPr>
@@ -4838,7 +4792,7 @@
       </p:sp>
       <p:sp>
         <p:nvSpPr>
-          <p:cNvPr id="9" name="TextBox 8"/>
+          <p:cNvPr id="8" name="TextBox 7"/>
           <p:cNvSpPr txBox="1"/>
           <p:nvPr/>
         </p:nvSpPr>
@@ -4937,7 +4891,7 @@
       </p:sp>
       <p:sp>
         <p:nvSpPr>
-          <p:cNvPr id="10" name="Rectangle 9"/>
+          <p:cNvPr id="9" name="Rectangle 8"/>
           <p:cNvSpPr/>
           <p:nvPr/>
         </p:nvSpPr>
@@ -4978,7 +4932,7 @@
       </p:sp>
       <p:sp>
         <p:nvSpPr>
-          <p:cNvPr id="11" name="Rectangle 10"/>
+          <p:cNvPr id="10" name="Rectangle 9"/>
           <p:cNvSpPr/>
           <p:nvPr/>
         </p:nvSpPr>
@@ -5019,7 +4973,7 @@
       </p:sp>
       <p:sp>
         <p:nvSpPr>
-          <p:cNvPr id="12" name="Rectangle 11"/>
+          <p:cNvPr id="11" name="Rectangle 10"/>
           <p:cNvSpPr/>
           <p:nvPr/>
         </p:nvSpPr>
@@ -5060,7 +5014,7 @@
       </p:sp>
       <p:sp>
         <p:nvSpPr>
-          <p:cNvPr id="13" name="TextBox 12"/>
+          <p:cNvPr id="12" name="TextBox 11"/>
           <p:cNvSpPr txBox="1"/>
           <p:nvPr/>
         </p:nvSpPr>
@@ -5102,7 +5056,7 @@
       </p:sp>
       <p:sp>
         <p:nvSpPr>
-          <p:cNvPr id="14" name="TextBox 13"/>
+          <p:cNvPr id="13" name="TextBox 12"/>
           <p:cNvSpPr txBox="1"/>
           <p:nvPr/>
         </p:nvSpPr>
@@ -5144,7 +5098,7 @@
       </p:sp>
       <p:sp>
         <p:nvSpPr>
-          <p:cNvPr id="15" name="TextBox 14"/>
+          <p:cNvPr id="14" name="TextBox 13"/>
           <p:cNvSpPr txBox="1"/>
           <p:nvPr/>
         </p:nvSpPr>
@@ -5243,7 +5197,7 @@
       </p:sp>
       <p:sp>
         <p:nvSpPr>
-          <p:cNvPr id="16" name="Rectangle 15"/>
+          <p:cNvPr id="15" name="Rectangle 14"/>
           <p:cNvSpPr/>
           <p:nvPr/>
         </p:nvSpPr>
@@ -5284,7 +5238,7 @@
       </p:sp>
       <p:sp>
         <p:nvSpPr>
-          <p:cNvPr id="17" name="Rectangle 16"/>
+          <p:cNvPr id="16" name="Rectangle 15"/>
           <p:cNvSpPr/>
           <p:nvPr/>
         </p:nvSpPr>
@@ -5325,7 +5279,7 @@
       </p:sp>
       <p:sp>
         <p:nvSpPr>
-          <p:cNvPr id="18" name="Rectangle 17"/>
+          <p:cNvPr id="17" name="Rectangle 16"/>
           <p:cNvSpPr/>
           <p:nvPr/>
         </p:nvSpPr>
@@ -5366,7 +5320,7 @@
       </p:sp>
       <p:sp>
         <p:nvSpPr>
-          <p:cNvPr id="19" name="TextBox 18"/>
+          <p:cNvPr id="18" name="TextBox 17"/>
           <p:cNvSpPr txBox="1"/>
           <p:nvPr/>
         </p:nvSpPr>
@@ -5408,7 +5362,7 @@
       </p:sp>
       <p:sp>
         <p:nvSpPr>
-          <p:cNvPr id="20" name="TextBox 19"/>
+          <p:cNvPr id="19" name="TextBox 18"/>
           <p:cNvSpPr txBox="1"/>
           <p:nvPr/>
         </p:nvSpPr>
@@ -5450,7 +5404,7 @@
       </p:sp>
       <p:sp>
         <p:nvSpPr>
-          <p:cNvPr id="21" name="TextBox 20"/>
+          <p:cNvPr id="20" name="TextBox 19"/>
           <p:cNvSpPr txBox="1"/>
           <p:nvPr/>
         </p:nvSpPr>
@@ -5549,7 +5503,7 @@
       </p:sp>
       <p:sp>
         <p:nvSpPr>
-          <p:cNvPr id="22" name="Rectangle 21"/>
+          <p:cNvPr id="21" name="Rectangle 20"/>
           <p:cNvSpPr/>
           <p:nvPr/>
         </p:nvSpPr>
@@ -5592,7 +5546,7 @@
       </p:sp>
       <p:sp>
         <p:nvSpPr>
-          <p:cNvPr id="23" name="Rectangle 22"/>
+          <p:cNvPr id="22" name="Rectangle 21"/>
           <p:cNvSpPr/>
           <p:nvPr/>
         </p:nvSpPr>
@@ -5633,7 +5587,7 @@
       </p:sp>
       <p:sp>
         <p:nvSpPr>
-          <p:cNvPr id="24" name="TextBox 23"/>
+          <p:cNvPr id="23" name="TextBox 22"/>
           <p:cNvSpPr txBox="1"/>
           <p:nvPr/>
         </p:nvSpPr>
@@ -5751,7 +5705,7 @@
       </p:sp>
       <p:sp>
         <p:nvSpPr>
-          <p:cNvPr id="25" name="TextBox 24"/>
+          <p:cNvPr id="24" name="TextBox 23"/>
           <p:cNvSpPr txBox="1"/>
           <p:nvPr/>
         </p:nvSpPr>
